--- a/VoicePulse_AI_Presentation.pptx
+++ b/VoicePulse_AI_Presentation.pptx
@@ -9,7 +9,6 @@
     <p:sldId id="257" r:id="rId8"/>
     <p:sldId id="258" r:id="rId9"/>
     <p:sldId id="259" r:id="rId10"/>
-    <p:sldId id="260" r:id="rId11"/>
   </p:sldIdLst>
   <p:sldSz cx="12191695" cy="6858000" type="screen4x3"/>
   <p:notesSz cx="6858000" cy="9144000"/>
@@ -3085,6 +3084,14 @@
 <file path=ppt/slides/slide1.xml><?xml version="1.0" encoding="utf-8"?>
 <p:sld xmlns:a="http://schemas.openxmlformats.org/drawingml/2006/main" xmlns:p="http://schemas.openxmlformats.org/presentationml/2006/main" xmlns:r="http://schemas.openxmlformats.org/officeDocument/2006/relationships">
   <p:cSld>
+    <p:bg>
+      <p:bgPr>
+        <a:solidFill>
+          <a:srgbClr val="0F172A"/>
+        </a:solidFill>
+        <a:effectLst/>
+      </p:bgPr>
+    </p:bg>
     <p:spTree>
       <p:nvGrpSpPr>
         <p:cNvPr id="1" name=""/>
@@ -3094,57 +3101,14 @@
       <p:grpSpPr/>
       <p:sp>
         <p:nvSpPr>
-          <p:cNvPr id="2" name="Rectangle 1"/>
-          <p:cNvSpPr/>
+          <p:cNvPr id="2" name="TextBox 1"/>
+          <p:cNvSpPr txBox="1"/>
           <p:nvPr/>
         </p:nvSpPr>
         <p:spPr>
           <a:xfrm>
-            <a:off x="0" y="0"/>
-            <a:ext cx="12191695" cy="6858000"/>
-          </a:xfrm>
-          <a:prstGeom prst="rect">
-            <a:avLst/>
-          </a:prstGeom>
-          <a:solidFill>
-            <a:srgbClr val="0F172A"/>
-          </a:solidFill>
-          <a:ln>
-            <a:noFill/>
-          </a:ln>
-        </p:spPr>
-        <p:style>
-          <a:lnRef idx="1">
-            <a:schemeClr val="accent1"/>
-          </a:lnRef>
-          <a:fillRef idx="3">
-            <a:schemeClr val="accent1"/>
-          </a:fillRef>
-          <a:effectRef idx="2">
-            <a:schemeClr val="accent1"/>
-          </a:effectRef>
-          <a:fontRef idx="minor">
-            <a:schemeClr val="lt1"/>
-          </a:fontRef>
-        </p:style>
-        <p:txBody>
-          <a:bodyPr rtlCol="0" anchor="ctr"/>
-          <a:lstStyle/>
-          <a:p>
-            <a:pPr algn="ctr"/>
-          </a:p>
-        </p:txBody>
-      </p:sp>
-      <p:sp>
-        <p:nvSpPr>
-          <p:cNvPr id="3" name="TextBox 2"/>
-          <p:cNvSpPr txBox="1"/>
-          <p:nvPr/>
-        </p:nvSpPr>
-        <p:spPr>
-          <a:xfrm>
-            <a:off x="914400" y="731520"/>
-            <a:ext cx="10362895" cy="1371600"/>
+            <a:off x="914400" y="2011680"/>
+            <a:ext cx="10332720" cy="2743200"/>
           </a:xfrm>
           <a:prstGeom prst="rect">
             <a:avLst/>
@@ -3158,31 +3122,140 @@
           <a:lstStyle/>
           <a:p>
             <a:pPr>
-              <a:defRPr sz="3600" b="1">
-                <a:solidFill>
-                  <a:srgbClr val="FFFFFF"/>
-                </a:solidFill>
-                <a:latin typeface="Segoe UI"/>
+              <a:defRPr sz="5400" b="1">
+                <a:solidFill>
+                  <a:srgbClr val="38BDF8"/>
+                </a:solidFill>
               </a:defRPr>
             </a:pPr>
             <a:r>
-              <a:t>VoicePulse AI Engine</a:t>
+              <a:t>VoicePulse AI</a:t>
             </a:r>
           </a:p>
           <a:p>
             <a:pPr>
               <a:spcBef>
-                <a:spcPts val="800"/>
+                <a:spcPts val="1000"/>
               </a:spcBef>
-              <a:defRPr sz="1800">
-                <a:solidFill>
-                  <a:srgbClr val="3B82F6"/>
-                </a:solidFill>
-                <a:latin typeface="Segoe UI"/>
+              <a:defRPr sz="2200">
+                <a:solidFill>
+                  <a:srgbClr val="F8FAFC"/>
+                </a:solidFill>
               </a:defRPr>
             </a:pPr>
             <a:r>
-              <a:t>Enterprise Real-Time Sales QA &amp; Compliance Intelligence Platform</a:t>
+              <a:t>Real-Time Voice QA &amp; Enterprise Speech Analytics Platform</a:t>
+            </a:r>
+          </a:p>
+          <a:p>
+            <a:pPr>
+              <a:spcBef>
+                <a:spcPts val="2500"/>
+              </a:spcBef>
+              <a:defRPr sz="1400">
+                <a:solidFill>
+                  <a:srgbClr val="94A3B8"/>
+                </a:solidFill>
+              </a:defRPr>
+            </a:pPr>
+            <a:r>
+              <a:t>Production-Ready Microservice Architecture • Built with FastAPI, Docker &amp; AssemblyAI</a:t>
+            </a:r>
+          </a:p>
+        </p:txBody>
+      </p:sp>
+    </p:spTree>
+  </p:cSld>
+  <p:clrMapOvr>
+    <a:masterClrMapping/>
+  </p:clrMapOvr>
+</p:sld>
+</file>
+
+<file path=ppt/slides/slide2.xml><?xml version="1.0" encoding="utf-8"?>
+<p:sld xmlns:a="http://schemas.openxmlformats.org/drawingml/2006/main" xmlns:p="http://schemas.openxmlformats.org/presentationml/2006/main" xmlns:r="http://schemas.openxmlformats.org/officeDocument/2006/relationships">
+  <p:cSld>
+    <p:bg>
+      <p:bgPr>
+        <a:solidFill>
+          <a:srgbClr val="0F172A"/>
+        </a:solidFill>
+        <a:effectLst/>
+      </p:bgPr>
+    </p:bg>
+    <p:spTree>
+      <p:nvGrpSpPr>
+        <p:cNvPr id="1" name=""/>
+        <p:cNvGrpSpPr/>
+        <p:nvPr/>
+      </p:nvGrpSpPr>
+      <p:grpSpPr/>
+      <p:sp>
+        <p:nvSpPr>
+          <p:cNvPr id="2" name="TextBox 1"/>
+          <p:cNvSpPr txBox="1"/>
+          <p:nvPr/>
+        </p:nvSpPr>
+        <p:spPr>
+          <a:xfrm>
+            <a:off x="731520" y="457200"/>
+            <a:ext cx="10698480" cy="365760"/>
+          </a:xfrm>
+          <a:prstGeom prst="rect">
+            <a:avLst/>
+          </a:prstGeom>
+          <a:noFill/>
+        </p:spPr>
+        <p:txBody>
+          <a:bodyPr wrap="none">
+            <a:spAutoFit/>
+          </a:bodyPr>
+          <a:lstStyle/>
+          <a:p>
+            <a:pPr>
+              <a:defRPr sz="1000" b="1">
+                <a:solidFill>
+                  <a:srgbClr val="A855F7"/>
+                </a:solidFill>
+              </a:defRPr>
+            </a:pPr>
+            <a:r>
+              <a:t>VOICEPULSE AI // SYSTEM ARCHITECTURE</a:t>
+            </a:r>
+          </a:p>
+        </p:txBody>
+      </p:sp>
+      <p:sp>
+        <p:nvSpPr>
+          <p:cNvPr id="3" name="TextBox 2"/>
+          <p:cNvSpPr txBox="1"/>
+          <p:nvPr/>
+        </p:nvSpPr>
+        <p:spPr>
+          <a:xfrm>
+            <a:off x="731520" y="731520"/>
+            <a:ext cx="10698480" cy="731520"/>
+          </a:xfrm>
+          <a:prstGeom prst="rect">
+            <a:avLst/>
+          </a:prstGeom>
+          <a:noFill/>
+        </p:spPr>
+        <p:txBody>
+          <a:bodyPr wrap="square">
+            <a:spAutoFit/>
+          </a:bodyPr>
+          <a:lstStyle/>
+          <a:p>
+            <a:pPr>
+              <a:defRPr sz="2800" b="1">
+                <a:solidFill>
+                  <a:srgbClr val="F8FAFC"/>
+                </a:solidFill>
+              </a:defRPr>
+            </a:pPr>
+            <a:r>
+              <a:t>The Challenge: Manual QA is Slow &amp; Unscalable</a:t>
             </a:r>
           </a:p>
         </p:txBody>
@@ -3195,8 +3268,8 @@
         </p:nvSpPr>
         <p:spPr>
           <a:xfrm>
-            <a:off x="914400" y="2103120"/>
-            <a:ext cx="10362895" cy="4114800"/>
+            <a:off x="731520" y="2011680"/>
+            <a:ext cx="3291840" cy="3840480"/>
           </a:xfrm>
           <a:prstGeom prst="roundRect">
             <a:avLst/>
@@ -3204,9 +3277,9 @@
           <a:solidFill>
             <a:srgbClr val="1E293B"/>
           </a:solidFill>
-          <a:ln w="19050">
+          <a:ln>
             <a:solidFill>
-              <a:srgbClr val="334155"/>
+              <a:srgbClr val="A855F7"/>
             </a:solidFill>
           </a:ln>
         </p:spPr>
@@ -3225,207 +3298,47 @@
           </a:fontRef>
         </p:style>
         <p:txBody>
-          <a:bodyPr rtlCol="0" anchor="ctr"/>
-          <a:lstStyle/>
-          <a:p>
-            <a:pPr algn="ctr"/>
-          </a:p>
-        </p:txBody>
-      </p:sp>
-      <p:sp>
-        <p:nvSpPr>
-          <p:cNvPr id="5" name="TextBox 4"/>
-          <p:cNvSpPr txBox="1"/>
+          <a:bodyPr rtlCol="0" anchor="ctr" wrap="square" tIns="365760" lIns="274320" rIns="274320"/>
+          <a:lstStyle/>
+          <a:p>
+            <a:pPr algn="ctr">
+              <a:defRPr sz="1800" b="1">
+                <a:solidFill>
+                  <a:srgbClr val="38BDF8"/>
+                </a:solidFill>
+              </a:defRPr>
+            </a:pPr>
+            <a:r>
+              <a:t>The Latency Bottleneck</a:t>
+            </a:r>
+          </a:p>
+          <a:p>
+            <a:pPr>
+              <a:spcBef>
+                <a:spcPts val="1500"/>
+              </a:spcBef>
+              <a:defRPr sz="1300">
+                <a:solidFill>
+                  <a:srgbClr val="94A3B8"/>
+                </a:solidFill>
+              </a:defRPr>
+            </a:pPr>
+            <a:r>
+              <a:t>Traditional speech review processes rely on manual spot-checking, causing severe evaluation delays across high-volume customer interaction lines.</a:t>
+            </a:r>
+          </a:p>
+        </p:txBody>
+      </p:sp>
+      <p:sp>
+        <p:nvSpPr>
+          <p:cNvPr id="5" name="Rounded Rectangle 4"/>
+          <p:cNvSpPr/>
           <p:nvPr/>
         </p:nvSpPr>
         <p:spPr>
           <a:xfrm>
-            <a:off x="1188720" y="2377440"/>
-            <a:ext cx="9784080" cy="3566160"/>
-          </a:xfrm>
-          <a:prstGeom prst="rect">
-            <a:avLst/>
-          </a:prstGeom>
-          <a:noFill/>
-        </p:spPr>
-        <p:txBody>
-          <a:bodyPr wrap="square">
-            <a:spAutoFit/>
-          </a:bodyPr>
-          <a:lstStyle/>
-          <a:p>
-            <a:pPr>
-              <a:spcBef>
-                <a:spcPts val="1400"/>
-              </a:spcBef>
-              <a:defRPr sz="1800">
-                <a:solidFill>
-                  <a:srgbClr val="CBD5E1"/>
-                </a:solidFill>
-                <a:latin typeface="Segoe UI"/>
-              </a:defRPr>
-            </a:pPr>
-            <a:r>
-              <a:t>• Presenter: Pervaiz | Machine Learning &amp; AI Engineer</a:t>
-            </a:r>
-          </a:p>
-          <a:p>
-            <a:pPr>
-              <a:spcBef>
-                <a:spcPts val="1400"/>
-              </a:spcBef>
-              <a:defRPr sz="1800">
-                <a:solidFill>
-                  <a:srgbClr val="CBD5E1"/>
-                </a:solidFill>
-                <a:latin typeface="Segoe UI"/>
-              </a:defRPr>
-            </a:pPr>
-            <a:r>
-              <a:t>• Core Mission: Safeguarding high-stakes customer calls with sub-second streaming analysis.</a:t>
-            </a:r>
-          </a:p>
-          <a:p>
-            <a:pPr>
-              <a:spcBef>
-                <a:spcPts val="1400"/>
-              </a:spcBef>
-              <a:defRPr sz="1800">
-                <a:solidFill>
-                  <a:srgbClr val="CBD5E1"/>
-                </a:solidFill>
-                <a:latin typeface="Segoe UI"/>
-              </a:defRPr>
-            </a:pPr>
-            <a:r>
-              <a:t>• Tech Stack: FastAPI, AssemblyAI V3 Universal Streaming, WebSockets, Web Audio API.</a:t>
-            </a:r>
-          </a:p>
-        </p:txBody>
-      </p:sp>
-    </p:spTree>
-  </p:cSld>
-  <p:clrMapOvr>
-    <a:masterClrMapping/>
-  </p:clrMapOvr>
-</p:sld>
-</file>
-
-<file path=ppt/slides/slide2.xml><?xml version="1.0" encoding="utf-8"?>
-<p:sld xmlns:a="http://schemas.openxmlformats.org/drawingml/2006/main" xmlns:p="http://schemas.openxmlformats.org/presentationml/2006/main" xmlns:r="http://schemas.openxmlformats.org/officeDocument/2006/relationships">
-  <p:cSld>
-    <p:spTree>
-      <p:nvGrpSpPr>
-        <p:cNvPr id="1" name=""/>
-        <p:cNvGrpSpPr/>
-        <p:nvPr/>
-      </p:nvGrpSpPr>
-      <p:grpSpPr/>
-      <p:sp>
-        <p:nvSpPr>
-          <p:cNvPr id="2" name="Rectangle 1"/>
-          <p:cNvSpPr/>
-          <p:nvPr/>
-        </p:nvSpPr>
-        <p:spPr>
-          <a:xfrm>
-            <a:off x="0" y="0"/>
-            <a:ext cx="12191695" cy="6858000"/>
-          </a:xfrm>
-          <a:prstGeom prst="rect">
-            <a:avLst/>
-          </a:prstGeom>
-          <a:solidFill>
-            <a:srgbClr val="0F172A"/>
-          </a:solidFill>
-          <a:ln>
-            <a:noFill/>
-          </a:ln>
-        </p:spPr>
-        <p:style>
-          <a:lnRef idx="1">
-            <a:schemeClr val="accent1"/>
-          </a:lnRef>
-          <a:fillRef idx="3">
-            <a:schemeClr val="accent1"/>
-          </a:fillRef>
-          <a:effectRef idx="2">
-            <a:schemeClr val="accent1"/>
-          </a:effectRef>
-          <a:fontRef idx="minor">
-            <a:schemeClr val="lt1"/>
-          </a:fontRef>
-        </p:style>
-        <p:txBody>
-          <a:bodyPr rtlCol="0" anchor="ctr"/>
-          <a:lstStyle/>
-          <a:p>
-            <a:pPr algn="ctr"/>
-          </a:p>
-        </p:txBody>
-      </p:sp>
-      <p:sp>
-        <p:nvSpPr>
-          <p:cNvPr id="3" name="TextBox 2"/>
-          <p:cNvSpPr txBox="1"/>
-          <p:nvPr/>
-        </p:nvSpPr>
-        <p:spPr>
-          <a:xfrm>
-            <a:off x="914400" y="731520"/>
-            <a:ext cx="10362895" cy="1371600"/>
-          </a:xfrm>
-          <a:prstGeom prst="rect">
-            <a:avLst/>
-          </a:prstGeom>
-          <a:noFill/>
-        </p:spPr>
-        <p:txBody>
-          <a:bodyPr wrap="square">
-            <a:spAutoFit/>
-          </a:bodyPr>
-          <a:lstStyle/>
-          <a:p>
-            <a:pPr>
-              <a:defRPr sz="3600" b="1">
-                <a:solidFill>
-                  <a:srgbClr val="FFFFFF"/>
-                </a:solidFill>
-                <a:latin typeface="Segoe UI"/>
-              </a:defRPr>
-            </a:pPr>
-            <a:r>
-              <a:t>The Enterprise Compliance Problem</a:t>
-            </a:r>
-          </a:p>
-          <a:p>
-            <a:pPr>
-              <a:spcBef>
-                <a:spcPts val="800"/>
-              </a:spcBef>
-              <a:defRPr sz="1800">
-                <a:solidFill>
-                  <a:srgbClr val="3B82F6"/>
-                </a:solidFill>
-                <a:latin typeface="Segoe UI"/>
-              </a:defRPr>
-            </a:pPr>
-            <a:r>
-              <a:t>Why Traditional QA Fails in Fast-Paced Sales Environments</a:t>
-            </a:r>
-          </a:p>
-        </p:txBody>
-      </p:sp>
-      <p:sp>
-        <p:nvSpPr>
-          <p:cNvPr id="4" name="Rounded Rectangle 3"/>
-          <p:cNvSpPr/>
-          <p:nvPr/>
-        </p:nvSpPr>
-        <p:spPr>
-          <a:xfrm>
-            <a:off x="914400" y="2103120"/>
-            <a:ext cx="10362895" cy="4114800"/>
+            <a:off x="4297680" y="2011680"/>
+            <a:ext cx="3291840" cy="3840480"/>
           </a:xfrm>
           <a:prstGeom prst="roundRect">
             <a:avLst/>
@@ -3433,9 +3346,9 @@
           <a:solidFill>
             <a:srgbClr val="1E293B"/>
           </a:solidFill>
-          <a:ln w="19050">
+          <a:ln>
             <a:solidFill>
-              <a:srgbClr val="334155"/>
+              <a:srgbClr val="A855F7"/>
             </a:solidFill>
           </a:ln>
         </p:spPr>
@@ -3454,207 +3367,47 @@
           </a:fontRef>
         </p:style>
         <p:txBody>
-          <a:bodyPr rtlCol="0" anchor="ctr"/>
-          <a:lstStyle/>
-          <a:p>
-            <a:pPr algn="ctr"/>
-          </a:p>
-        </p:txBody>
-      </p:sp>
-      <p:sp>
-        <p:nvSpPr>
-          <p:cNvPr id="5" name="TextBox 4"/>
-          <p:cNvSpPr txBox="1"/>
+          <a:bodyPr rtlCol="0" anchor="ctr" wrap="square" tIns="365760" lIns="274320" rIns="274320"/>
+          <a:lstStyle/>
+          <a:p>
+            <a:pPr algn="ctr">
+              <a:defRPr sz="1800" b="1">
+                <a:solidFill>
+                  <a:srgbClr val="38BDF8"/>
+                </a:solidFill>
+              </a:defRPr>
+            </a:pPr>
+            <a:r>
+              <a:t>Compliance Blind Spots</a:t>
+            </a:r>
+          </a:p>
+          <a:p>
+            <a:pPr>
+              <a:spcBef>
+                <a:spcPts val="1500"/>
+              </a:spcBef>
+              <a:defRPr sz="1300">
+                <a:solidFill>
+                  <a:srgbClr val="94A3B8"/>
+                </a:solidFill>
+              </a:defRPr>
+            </a:pPr>
+            <a:r>
+              <a:t>Human oversight misses up to 85% of regulatory or script adherence infractions during live agent-customer audio calls.</a:t>
+            </a:r>
+          </a:p>
+        </p:txBody>
+      </p:sp>
+      <p:sp>
+        <p:nvSpPr>
+          <p:cNvPr id="6" name="Rounded Rectangle 5"/>
+          <p:cNvSpPr/>
           <p:nvPr/>
         </p:nvSpPr>
         <p:spPr>
           <a:xfrm>
-            <a:off x="1188720" y="2377440"/>
-            <a:ext cx="9784080" cy="3566160"/>
-          </a:xfrm>
-          <a:prstGeom prst="rect">
-            <a:avLst/>
-          </a:prstGeom>
-          <a:noFill/>
-        </p:spPr>
-        <p:txBody>
-          <a:bodyPr wrap="square">
-            <a:spAutoFit/>
-          </a:bodyPr>
-          <a:lstStyle/>
-          <a:p>
-            <a:pPr>
-              <a:spcBef>
-                <a:spcPts val="1400"/>
-              </a:spcBef>
-              <a:defRPr sz="1800">
-                <a:solidFill>
-                  <a:srgbClr val="CBD5E1"/>
-                </a:solidFill>
-                <a:latin typeface="Segoe UI"/>
-              </a:defRPr>
-            </a:pPr>
-            <a:r>
-              <a:t>• Manual Post-Call Bottleneck: Reviews happen after calls conclude, resulting in irreversible regulatory violations.</a:t>
-            </a:r>
-          </a:p>
-          <a:p>
-            <a:pPr>
-              <a:spcBef>
-                <a:spcPts val="1400"/>
-              </a:spcBef>
-              <a:defRPr sz="1800">
-                <a:solidFill>
-                  <a:srgbClr val="CBD5E1"/>
-                </a:solidFill>
-                <a:latin typeface="Segoe UI"/>
-              </a:defRPr>
-            </a:pPr>
-            <a:r>
-              <a:t>• High Financial Exposure: Absolute guarantees ('100% safe', 'guaranteed returns') lead to massive compliance fines.</a:t>
-            </a:r>
-          </a:p>
-          <a:p>
-            <a:pPr>
-              <a:spcBef>
-                <a:spcPts val="1400"/>
-              </a:spcBef>
-              <a:defRPr sz="1800">
-                <a:solidFill>
-                  <a:srgbClr val="CBD5E1"/>
-                </a:solidFill>
-                <a:latin typeface="Segoe UI"/>
-              </a:defRPr>
-            </a:pPr>
-            <a:r>
-              <a:t>• Real-Time Intervention Gap: Existing solutions lack low-latency streaming engines capable of whispering real-time alerts to agents.</a:t>
-            </a:r>
-          </a:p>
-        </p:txBody>
-      </p:sp>
-    </p:spTree>
-  </p:cSld>
-  <p:clrMapOvr>
-    <a:masterClrMapping/>
-  </p:clrMapOvr>
-</p:sld>
-</file>
-
-<file path=ppt/slides/slide3.xml><?xml version="1.0" encoding="utf-8"?>
-<p:sld xmlns:a="http://schemas.openxmlformats.org/drawingml/2006/main" xmlns:p="http://schemas.openxmlformats.org/presentationml/2006/main" xmlns:r="http://schemas.openxmlformats.org/officeDocument/2006/relationships">
-  <p:cSld>
-    <p:spTree>
-      <p:nvGrpSpPr>
-        <p:cNvPr id="1" name=""/>
-        <p:cNvGrpSpPr/>
-        <p:nvPr/>
-      </p:nvGrpSpPr>
-      <p:grpSpPr/>
-      <p:sp>
-        <p:nvSpPr>
-          <p:cNvPr id="2" name="Rectangle 1"/>
-          <p:cNvSpPr/>
-          <p:nvPr/>
-        </p:nvSpPr>
-        <p:spPr>
-          <a:xfrm>
-            <a:off x="0" y="0"/>
-            <a:ext cx="12191695" cy="6858000"/>
-          </a:xfrm>
-          <a:prstGeom prst="rect">
-            <a:avLst/>
-          </a:prstGeom>
-          <a:solidFill>
-            <a:srgbClr val="0F172A"/>
-          </a:solidFill>
-          <a:ln>
-            <a:noFill/>
-          </a:ln>
-        </p:spPr>
-        <p:style>
-          <a:lnRef idx="1">
-            <a:schemeClr val="accent1"/>
-          </a:lnRef>
-          <a:fillRef idx="3">
-            <a:schemeClr val="accent1"/>
-          </a:fillRef>
-          <a:effectRef idx="2">
-            <a:schemeClr val="accent1"/>
-          </a:effectRef>
-          <a:fontRef idx="minor">
-            <a:schemeClr val="lt1"/>
-          </a:fontRef>
-        </p:style>
-        <p:txBody>
-          <a:bodyPr rtlCol="0" anchor="ctr"/>
-          <a:lstStyle/>
-          <a:p>
-            <a:pPr algn="ctr"/>
-          </a:p>
-        </p:txBody>
-      </p:sp>
-      <p:sp>
-        <p:nvSpPr>
-          <p:cNvPr id="3" name="TextBox 2"/>
-          <p:cNvSpPr txBox="1"/>
-          <p:nvPr/>
-        </p:nvSpPr>
-        <p:spPr>
-          <a:xfrm>
-            <a:off x="914400" y="731520"/>
-            <a:ext cx="10362895" cy="1371600"/>
-          </a:xfrm>
-          <a:prstGeom prst="rect">
-            <a:avLst/>
-          </a:prstGeom>
-          <a:noFill/>
-        </p:spPr>
-        <p:txBody>
-          <a:bodyPr wrap="square">
-            <a:spAutoFit/>
-          </a:bodyPr>
-          <a:lstStyle/>
-          <a:p>
-            <a:pPr>
-              <a:defRPr sz="3600" b="1">
-                <a:solidFill>
-                  <a:srgbClr val="FFFFFF"/>
-                </a:solidFill>
-                <a:latin typeface="Segoe UI"/>
-              </a:defRPr>
-            </a:pPr>
-            <a:r>
-              <a:t>System Architecture &amp; Data Flow</a:t>
-            </a:r>
-          </a:p>
-          <a:p>
-            <a:pPr>
-              <a:spcBef>
-                <a:spcPts val="800"/>
-              </a:spcBef>
-              <a:defRPr sz="1800">
-                <a:solidFill>
-                  <a:srgbClr val="3B82F6"/>
-                </a:solidFill>
-                <a:latin typeface="Segoe UI"/>
-              </a:defRPr>
-            </a:pPr>
-            <a:r>
-              <a:t>End-to-End Real-Time Pipeline Design</a:t>
-            </a:r>
-          </a:p>
-        </p:txBody>
-      </p:sp>
-      <p:sp>
-        <p:nvSpPr>
-          <p:cNvPr id="4" name="Rounded Rectangle 3"/>
-          <p:cNvSpPr/>
-          <p:nvPr/>
-        </p:nvSpPr>
-        <p:spPr>
-          <a:xfrm>
-            <a:off x="914400" y="2103120"/>
-            <a:ext cx="10362895" cy="4114800"/>
+            <a:off x="7863840" y="2011680"/>
+            <a:ext cx="3291840" cy="3840480"/>
           </a:xfrm>
           <a:prstGeom prst="roundRect">
             <a:avLst/>
@@ -3662,9 +3415,9 @@
           <a:solidFill>
             <a:srgbClr val="1E293B"/>
           </a:solidFill>
-          <a:ln w="19050">
+          <a:ln>
             <a:solidFill>
-              <a:srgbClr val="334155"/>
+              <a:srgbClr val="A855F7"/>
             </a:solidFill>
           </a:ln>
         </p:spPr>
@@ -3683,96 +3436,33 @@
           </a:fontRef>
         </p:style>
         <p:txBody>
-          <a:bodyPr rtlCol="0" anchor="ctr"/>
-          <a:lstStyle/>
-          <a:p>
-            <a:pPr algn="ctr"/>
-          </a:p>
-        </p:txBody>
-      </p:sp>
-      <p:sp>
-        <p:nvSpPr>
-          <p:cNvPr id="5" name="TextBox 4"/>
-          <p:cNvSpPr txBox="1"/>
-          <p:nvPr/>
-        </p:nvSpPr>
-        <p:spPr>
-          <a:xfrm>
-            <a:off x="1188720" y="2377440"/>
-            <a:ext cx="9784080" cy="3566160"/>
-          </a:xfrm>
-          <a:prstGeom prst="rect">
-            <a:avLst/>
-          </a:prstGeom>
-          <a:noFill/>
-        </p:spPr>
-        <p:txBody>
-          <a:bodyPr wrap="square">
-            <a:spAutoFit/>
-          </a:bodyPr>
-          <a:lstStyle/>
+          <a:bodyPr rtlCol="0" anchor="ctr" wrap="square" tIns="365760" lIns="274320" rIns="274320"/>
+          <a:lstStyle/>
+          <a:p>
+            <a:pPr algn="ctr">
+              <a:defRPr sz="1800" b="1">
+                <a:solidFill>
+                  <a:srgbClr val="38BDF8"/>
+                </a:solidFill>
+              </a:defRPr>
+            </a:pPr>
+            <a:r>
+              <a:t>Integration Friction</a:t>
+            </a:r>
+          </a:p>
           <a:p>
             <a:pPr>
               <a:spcBef>
-                <a:spcPts val="1400"/>
+                <a:spcPts val="1500"/>
               </a:spcBef>
-              <a:defRPr sz="1800">
-                <a:solidFill>
-                  <a:srgbClr val="CBD5E1"/>
-                </a:solidFill>
-                <a:latin typeface="Segoe UI"/>
+              <a:defRPr sz="1300">
+                <a:solidFill>
+                  <a:srgbClr val="94A3B8"/>
+                </a:solidFill>
               </a:defRPr>
             </a:pPr>
             <a:r>
-              <a:t>• Client Audio Ingestion: Browser Web Audio API captures microphone input, downsampling to 16kHz raw PCM.</a:t>
-            </a:r>
-          </a:p>
-          <a:p>
-            <a:pPr>
-              <a:spcBef>
-                <a:spcPts val="1400"/>
-              </a:spcBef>
-              <a:defRPr sz="1800">
-                <a:solidFill>
-                  <a:srgbClr val="CBD5E1"/>
-                </a:solidFill>
-                <a:latin typeface="Segoe UI"/>
-              </a:defRPr>
-            </a:pPr>
-            <a:r>
-              <a:t>• Secure Backend Handshake: FastAPI proxy endpoint (`/api/token`) generates short-lived AssemblyAI V3 tokens securely.</a:t>
-            </a:r>
-          </a:p>
-          <a:p>
-            <a:pPr>
-              <a:spcBef>
-                <a:spcPts val="1400"/>
-              </a:spcBef>
-              <a:defRPr sz="1800">
-                <a:solidFill>
-                  <a:srgbClr val="CBD5E1"/>
-                </a:solidFill>
-                <a:latin typeface="Segoe UI"/>
-              </a:defRPr>
-            </a:pPr>
-            <a:r>
-              <a:t>• Real-Time WebSocket Stream: Bidirectional stream (`wss://`) processes live audio packets sub-second.</a:t>
-            </a:r>
-          </a:p>
-          <a:p>
-            <a:pPr>
-              <a:spcBef>
-                <a:spcPts val="1400"/>
-              </a:spcBef>
-              <a:defRPr sz="1800">
-                <a:solidFill>
-                  <a:srgbClr val="CBD5E1"/>
-                </a:solidFill>
-                <a:latin typeface="Segoe UI"/>
-              </a:defRPr>
-            </a:pPr>
-            <a:r>
-              <a:t>• Semantic Risk Evaluation: Turn-by-turn POST requests calculate risk scores and trigger instant UI supervisor alerts.</a:t>
+              <a:t>Existing analytics tools lack lightweight, plug-and-play containerized deployment frameworks required by modern cloud infrastructures.</a:t>
             </a:r>
           </a:p>
         </p:txBody>
@@ -3785,9 +3475,17 @@
 </p:sld>
 </file>
 
-<file path=ppt/slides/slide4.xml><?xml version="1.0" encoding="utf-8"?>
+<file path=ppt/slides/slide3.xml><?xml version="1.0" encoding="utf-8"?>
 <p:sld xmlns:a="http://schemas.openxmlformats.org/drawingml/2006/main" xmlns:p="http://schemas.openxmlformats.org/presentationml/2006/main" xmlns:r="http://schemas.openxmlformats.org/officeDocument/2006/relationships">
   <p:cSld>
+    <p:bg>
+      <p:bgPr>
+        <a:solidFill>
+          <a:srgbClr val="0F172A"/>
+        </a:solidFill>
+        <a:effectLst/>
+      </p:bgPr>
+    </p:bg>
     <p:spTree>
       <p:nvGrpSpPr>
         <p:cNvPr id="1" name=""/>
@@ -3797,57 +3495,14 @@
       <p:grpSpPr/>
       <p:sp>
         <p:nvSpPr>
-          <p:cNvPr id="2" name="Rectangle 1"/>
-          <p:cNvSpPr/>
+          <p:cNvPr id="2" name="TextBox 1"/>
+          <p:cNvSpPr txBox="1"/>
           <p:nvPr/>
         </p:nvSpPr>
         <p:spPr>
           <a:xfrm>
-            <a:off x="0" y="0"/>
-            <a:ext cx="12191695" cy="6858000"/>
-          </a:xfrm>
-          <a:prstGeom prst="rect">
-            <a:avLst/>
-          </a:prstGeom>
-          <a:solidFill>
-            <a:srgbClr val="0F172A"/>
-          </a:solidFill>
-          <a:ln>
-            <a:noFill/>
-          </a:ln>
-        </p:spPr>
-        <p:style>
-          <a:lnRef idx="1">
-            <a:schemeClr val="accent1"/>
-          </a:lnRef>
-          <a:fillRef idx="3">
-            <a:schemeClr val="accent1"/>
-          </a:fillRef>
-          <a:effectRef idx="2">
-            <a:schemeClr val="accent1"/>
-          </a:effectRef>
-          <a:fontRef idx="minor">
-            <a:schemeClr val="lt1"/>
-          </a:fontRef>
-        </p:style>
-        <p:txBody>
-          <a:bodyPr rtlCol="0" anchor="ctr"/>
-          <a:lstStyle/>
-          <a:p>
-            <a:pPr algn="ctr"/>
-          </a:p>
-        </p:txBody>
-      </p:sp>
-      <p:sp>
-        <p:nvSpPr>
-          <p:cNvPr id="3" name="TextBox 2"/>
-          <p:cNvSpPr txBox="1"/>
-          <p:nvPr/>
-        </p:nvSpPr>
-        <p:spPr>
-          <a:xfrm>
-            <a:off x="914400" y="731520"/>
-            <a:ext cx="10362895" cy="1371600"/>
+            <a:off x="731520" y="457200"/>
+            <a:ext cx="10698480" cy="365760"/>
           </a:xfrm>
           <a:prstGeom prst="rect">
             <a:avLst/>
@@ -3855,61 +3510,79 @@
           <a:noFill/>
         </p:spPr>
         <p:txBody>
+          <a:bodyPr wrap="none">
+            <a:spAutoFit/>
+          </a:bodyPr>
+          <a:lstStyle/>
+          <a:p>
+            <a:pPr>
+              <a:defRPr sz="1000" b="1">
+                <a:solidFill>
+                  <a:srgbClr val="A855F7"/>
+                </a:solidFill>
+              </a:defRPr>
+            </a:pPr>
+            <a:r>
+              <a:t>VOICEPULSE AI // SYSTEM ARCHITECTURE</a:t>
+            </a:r>
+          </a:p>
+        </p:txBody>
+      </p:sp>
+      <p:sp>
+        <p:nvSpPr>
+          <p:cNvPr id="3" name="TextBox 2"/>
+          <p:cNvSpPr txBox="1"/>
+          <p:nvPr/>
+        </p:nvSpPr>
+        <p:spPr>
+          <a:xfrm>
+            <a:off x="731520" y="731520"/>
+            <a:ext cx="10698480" cy="731520"/>
+          </a:xfrm>
+          <a:prstGeom prst="rect">
+            <a:avLst/>
+          </a:prstGeom>
+          <a:noFill/>
+        </p:spPr>
+        <p:txBody>
           <a:bodyPr wrap="square">
             <a:spAutoFit/>
           </a:bodyPr>
           <a:lstStyle/>
           <a:p>
             <a:pPr>
-              <a:defRPr sz="3600" b="1">
-                <a:solidFill>
-                  <a:srgbClr val="FFFFFF"/>
-                </a:solidFill>
-                <a:latin typeface="Segoe UI"/>
+              <a:defRPr sz="2800" b="1">
+                <a:solidFill>
+                  <a:srgbClr val="F8FAFC"/>
+                </a:solidFill>
               </a:defRPr>
             </a:pPr>
             <a:r>
-              <a:t>Engineering Challenges &amp; Solutions</a:t>
-            </a:r>
-          </a:p>
-          <a:p>
-            <a:pPr>
-              <a:spcBef>
-                <a:spcPts val="800"/>
-              </a:spcBef>
-              <a:defRPr sz="1800">
-                <a:solidFill>
-                  <a:srgbClr val="3B82F6"/>
-                </a:solidFill>
-                <a:latin typeface="Segoe UI"/>
-              </a:defRPr>
-            </a:pPr>
-            <a:r>
-              <a:t>Overcoming Complex Integration Roadblocks</a:t>
-            </a:r>
-          </a:p>
-        </p:txBody>
-      </p:sp>
-      <p:sp>
-        <p:nvSpPr>
-          <p:cNvPr id="4" name="Rounded Rectangle 3"/>
+              <a:t>Working Flow Diagram: End-to-End Pipeline</a:t>
+            </a:r>
+          </a:p>
+        </p:txBody>
+      </p:sp>
+      <p:sp>
+        <p:nvSpPr>
+          <p:cNvPr id="4" name="Rectangle 3"/>
           <p:cNvSpPr/>
           <p:nvPr/>
         </p:nvSpPr>
         <p:spPr>
           <a:xfrm>
-            <a:off x="914400" y="2103120"/>
-            <a:ext cx="10362895" cy="4114800"/>
+            <a:off x="731520" y="1828800"/>
+            <a:ext cx="2926080" cy="822960"/>
           </a:xfrm>
-          <a:prstGeom prst="roundRect">
+          <a:prstGeom prst="rect">
             <a:avLst/>
           </a:prstGeom>
           <a:solidFill>
             <a:srgbClr val="1E293B"/>
           </a:solidFill>
-          <a:ln w="19050">
+          <a:ln>
             <a:solidFill>
-              <a:srgbClr val="334155"/>
+              <a:srgbClr val="38BDF8"/>
             </a:solidFill>
           </a:ln>
         </p:spPr>
@@ -3931,7 +3604,16 @@
           <a:bodyPr rtlCol="0" anchor="ctr"/>
           <a:lstStyle/>
           <a:p>
-            <a:pPr algn="ctr"/>
+            <a:pPr algn="ctr">
+              <a:defRPr sz="1400" b="1">
+                <a:solidFill>
+                  <a:srgbClr val="38BDF8"/>
+                </a:solidFill>
+              </a:defRPr>
+            </a:pPr>
+            <a:r>
+              <a:t>1. Ingestion Layer</a:t>
+            </a:r>
           </a:p>
         </p:txBody>
       </p:sp>
@@ -3943,8 +3625,8 @@
         </p:nvSpPr>
         <p:spPr>
           <a:xfrm>
-            <a:off x="1188720" y="2377440"/>
-            <a:ext cx="9784080" cy="3566160"/>
+            <a:off x="3931920" y="1828800"/>
+            <a:ext cx="7315200" cy="822960"/>
           </a:xfrm>
           <a:prstGeom prst="rect">
             <a:avLst/>
@@ -3958,187 +3640,38 @@
           <a:lstStyle/>
           <a:p>
             <a:pPr>
-              <a:spcBef>
-                <a:spcPts val="1400"/>
-              </a:spcBef>
-              <a:defRPr sz="1800">
-                <a:solidFill>
-                  <a:srgbClr val="CBD5E1"/>
-                </a:solidFill>
-                <a:latin typeface="Segoe UI"/>
+              <a:defRPr sz="1400">
+                <a:solidFill>
+                  <a:srgbClr val="F8FAFC"/>
+                </a:solidFill>
               </a:defRPr>
             </a:pPr>
             <a:r>
-              <a:t>• API Credential Isolation: Routed all token generation requests through a protected backend layer, preventing browser exposure.</a:t>
-            </a:r>
-          </a:p>
-          <a:p>
-            <a:pPr>
-              <a:spcBef>
-                <a:spcPts val="1400"/>
-              </a:spcBef>
-              <a:defRPr sz="1800">
-                <a:solidFill>
-                  <a:srgbClr val="CBD5E1"/>
-                </a:solidFill>
-                <a:latin typeface="Segoe UI"/>
-              </a:defRPr>
-            </a:pPr>
-            <a:r>
-              <a:t>• Strict Header Sanitization: Implemented rigorous string cleaning (.strip(), quote/newline stripping) to solve 401 auth rejections.</a:t>
-            </a:r>
-          </a:p>
-          <a:p>
-            <a:pPr>
-              <a:spcBef>
-                <a:spcPts val="1400"/>
-              </a:spcBef>
-              <a:defRPr sz="1800">
-                <a:solidFill>
-                  <a:srgbClr val="CBD5E1"/>
-                </a:solidFill>
-                <a:latin typeface="Segoe UI"/>
-              </a:defRPr>
-            </a:pPr>
-            <a:r>
-              <a:t>• Audio Buffer Optimization: Managed ScriptProcessorNode buffers (`Int16Array`) to ensure zero-latency packet transmission without audio clipping.</a:t>
-            </a:r>
-          </a:p>
-        </p:txBody>
-      </p:sp>
-    </p:spTree>
-  </p:cSld>
-  <p:clrMapOvr>
-    <a:masterClrMapping/>
-  </p:clrMapOvr>
-</p:sld>
-</file>
-
-<file path=ppt/slides/slide5.xml><?xml version="1.0" encoding="utf-8"?>
-<p:sld xmlns:a="http://schemas.openxmlformats.org/drawingml/2006/main" xmlns:p="http://schemas.openxmlformats.org/presentationml/2006/main" xmlns:r="http://schemas.openxmlformats.org/officeDocument/2006/relationships">
-  <p:cSld>
-    <p:spTree>
-      <p:nvGrpSpPr>
-        <p:cNvPr id="1" name=""/>
-        <p:cNvGrpSpPr/>
-        <p:nvPr/>
-      </p:nvGrpSpPr>
-      <p:grpSpPr/>
-      <p:sp>
-        <p:nvSpPr>
-          <p:cNvPr id="2" name="Rectangle 1"/>
+              <a:t>Audio input streams or payloads sent securely to FastAPI REST endpoints.</a:t>
+            </a:r>
+          </a:p>
+        </p:txBody>
+      </p:sp>
+      <p:sp>
+        <p:nvSpPr>
+          <p:cNvPr id="6" name="Rectangle 5"/>
           <p:cNvSpPr/>
           <p:nvPr/>
         </p:nvSpPr>
         <p:spPr>
           <a:xfrm>
-            <a:off x="0" y="0"/>
-            <a:ext cx="12191695" cy="6858000"/>
+            <a:off x="731520" y="2926080"/>
+            <a:ext cx="2926080" cy="822960"/>
           </a:xfrm>
           <a:prstGeom prst="rect">
             <a:avLst/>
           </a:prstGeom>
           <a:solidFill>
-            <a:srgbClr val="0F172A"/>
+            <a:srgbClr val="1E293B"/>
           </a:solidFill>
           <a:ln>
-            <a:noFill/>
-          </a:ln>
-        </p:spPr>
-        <p:style>
-          <a:lnRef idx="1">
-            <a:schemeClr val="accent1"/>
-          </a:lnRef>
-          <a:fillRef idx="3">
-            <a:schemeClr val="accent1"/>
-          </a:fillRef>
-          <a:effectRef idx="2">
-            <a:schemeClr val="accent1"/>
-          </a:effectRef>
-          <a:fontRef idx="minor">
-            <a:schemeClr val="lt1"/>
-          </a:fontRef>
-        </p:style>
-        <p:txBody>
-          <a:bodyPr rtlCol="0" anchor="ctr"/>
-          <a:lstStyle/>
-          <a:p>
-            <a:pPr algn="ctr"/>
-          </a:p>
-        </p:txBody>
-      </p:sp>
-      <p:sp>
-        <p:nvSpPr>
-          <p:cNvPr id="3" name="TextBox 2"/>
-          <p:cNvSpPr txBox="1"/>
-          <p:nvPr/>
-        </p:nvSpPr>
-        <p:spPr>
-          <a:xfrm>
-            <a:off x="914400" y="731520"/>
-            <a:ext cx="10362895" cy="1371600"/>
-          </a:xfrm>
-          <a:prstGeom prst="rect">
-            <a:avLst/>
-          </a:prstGeom>
-          <a:noFill/>
-        </p:spPr>
-        <p:txBody>
-          <a:bodyPr wrap="square">
-            <a:spAutoFit/>
-          </a:bodyPr>
-          <a:lstStyle/>
-          <a:p>
-            <a:pPr>
-              <a:defRPr sz="3600" b="1">
-                <a:solidFill>
-                  <a:srgbClr val="FFFFFF"/>
-                </a:solidFill>
-                <a:latin typeface="Segoe UI"/>
-              </a:defRPr>
-            </a:pPr>
-            <a:r>
-              <a:t>Business Impact &amp; Future Roadmap</a:t>
-            </a:r>
-          </a:p>
-          <a:p>
-            <a:pPr>
-              <a:spcBef>
-                <a:spcPts val="800"/>
-              </a:spcBef>
-              <a:defRPr sz="1800">
-                <a:solidFill>
-                  <a:srgbClr val="3B82F6"/>
-                </a:solidFill>
-                <a:latin typeface="Segoe UI"/>
-              </a:defRPr>
-            </a:pPr>
-            <a:r>
-              <a:t>Measurable Value &amp; Scalability</a:t>
-            </a:r>
-          </a:p>
-        </p:txBody>
-      </p:sp>
-      <p:sp>
-        <p:nvSpPr>
-          <p:cNvPr id="4" name="Rounded Rectangle 3"/>
-          <p:cNvSpPr/>
-          <p:nvPr/>
-        </p:nvSpPr>
-        <p:spPr>
-          <a:xfrm>
-            <a:off x="914400" y="2103120"/>
-            <a:ext cx="10362895" cy="4114800"/>
-          </a:xfrm>
-          <a:prstGeom prst="roundRect">
-            <a:avLst/>
-          </a:prstGeom>
-          <a:solidFill>
-            <a:srgbClr val="1E293B"/>
-          </a:solidFill>
-          <a:ln w="19050">
             <a:solidFill>
-              <a:srgbClr val="334155"/>
+              <a:srgbClr val="38BDF8"/>
             </a:solidFill>
           </a:ln>
         </p:spPr>
@@ -4160,20 +3693,29 @@
           <a:bodyPr rtlCol="0" anchor="ctr"/>
           <a:lstStyle/>
           <a:p>
-            <a:pPr algn="ctr"/>
-          </a:p>
-        </p:txBody>
-      </p:sp>
-      <p:sp>
-        <p:nvSpPr>
-          <p:cNvPr id="5" name="TextBox 4"/>
+            <a:pPr algn="ctr">
+              <a:defRPr sz="1400" b="1">
+                <a:solidFill>
+                  <a:srgbClr val="38BDF8"/>
+                </a:solidFill>
+              </a:defRPr>
+            </a:pPr>
+            <a:r>
+              <a:t>2. Auth &amp; Processing</a:t>
+            </a:r>
+          </a:p>
+        </p:txBody>
+      </p:sp>
+      <p:sp>
+        <p:nvSpPr>
+          <p:cNvPr id="7" name="TextBox 6"/>
           <p:cNvSpPr txBox="1"/>
           <p:nvPr/>
         </p:nvSpPr>
         <p:spPr>
           <a:xfrm>
-            <a:off x="1188720" y="2377440"/>
-            <a:ext cx="9784080" cy="3566160"/>
+            <a:off x="3931920" y="2926080"/>
+            <a:ext cx="7315200" cy="822960"/>
           </a:xfrm>
           <a:prstGeom prst="rect">
             <a:avLst/>
@@ -4187,50 +3729,630 @@
           <a:lstStyle/>
           <a:p>
             <a:pPr>
-              <a:spcBef>
-                <a:spcPts val="1400"/>
-              </a:spcBef>
-              <a:defRPr sz="1800">
-                <a:solidFill>
-                  <a:srgbClr val="CBD5E1"/>
-                </a:solidFill>
-                <a:latin typeface="Segoe UI"/>
+              <a:defRPr sz="1400">
+                <a:solidFill>
+                  <a:srgbClr val="F8FAFC"/>
+                </a:solidFill>
               </a:defRPr>
             </a:pPr>
             <a:r>
-              <a:t>• 85% Reduction in QA Audit Overhead: Automates compliance checks across thousands of concurrent calls.</a:t>
+              <a:t>Token validation, schema validation with Pydantic v2, and queue sorting.</a:t>
+            </a:r>
+          </a:p>
+        </p:txBody>
+      </p:sp>
+      <p:sp>
+        <p:nvSpPr>
+          <p:cNvPr id="8" name="Rectangle 7"/>
+          <p:cNvSpPr/>
+          <p:nvPr/>
+        </p:nvSpPr>
+        <p:spPr>
+          <a:xfrm>
+            <a:off x="731520" y="4023360"/>
+            <a:ext cx="2926080" cy="822960"/>
+          </a:xfrm>
+          <a:prstGeom prst="rect">
+            <a:avLst/>
+          </a:prstGeom>
+          <a:solidFill>
+            <a:srgbClr val="1E293B"/>
+          </a:solidFill>
+          <a:ln>
+            <a:solidFill>
+              <a:srgbClr val="38BDF8"/>
+            </a:solidFill>
+          </a:ln>
+        </p:spPr>
+        <p:style>
+          <a:lnRef idx="1">
+            <a:schemeClr val="accent1"/>
+          </a:lnRef>
+          <a:fillRef idx="3">
+            <a:schemeClr val="accent1"/>
+          </a:fillRef>
+          <a:effectRef idx="2">
+            <a:schemeClr val="accent1"/>
+          </a:effectRef>
+          <a:fontRef idx="minor">
+            <a:schemeClr val="lt1"/>
+          </a:fontRef>
+        </p:style>
+        <p:txBody>
+          <a:bodyPr rtlCol="0" anchor="ctr"/>
+          <a:lstStyle/>
+          <a:p>
+            <a:pPr algn="ctr">
+              <a:defRPr sz="1400" b="1">
+                <a:solidFill>
+                  <a:srgbClr val="38BDF8"/>
+                </a:solidFill>
+              </a:defRPr>
+            </a:pPr>
+            <a:r>
+              <a:t>3. Speech Engine</a:t>
+            </a:r>
+          </a:p>
+        </p:txBody>
+      </p:sp>
+      <p:sp>
+        <p:nvSpPr>
+          <p:cNvPr id="9" name="TextBox 8"/>
+          <p:cNvSpPr txBox="1"/>
+          <p:nvPr/>
+        </p:nvSpPr>
+        <p:spPr>
+          <a:xfrm>
+            <a:off x="3931920" y="4023360"/>
+            <a:ext cx="7315200" cy="822960"/>
+          </a:xfrm>
+          <a:prstGeom prst="rect">
+            <a:avLst/>
+          </a:prstGeom>
+          <a:noFill/>
+        </p:spPr>
+        <p:txBody>
+          <a:bodyPr wrap="square">
+            <a:spAutoFit/>
+          </a:bodyPr>
+          <a:lstStyle/>
+          <a:p>
+            <a:pPr>
+              <a:defRPr sz="1400">
+                <a:solidFill>
+                  <a:srgbClr val="F8FAFC"/>
+                </a:solidFill>
+              </a:defRPr>
+            </a:pPr>
+            <a:r>
+              <a:t>AssemblyAI streaming integration processes audio transcripts instantly.</a:t>
+            </a:r>
+          </a:p>
+        </p:txBody>
+      </p:sp>
+      <p:sp>
+        <p:nvSpPr>
+          <p:cNvPr id="10" name="Rectangle 9"/>
+          <p:cNvSpPr/>
+          <p:nvPr/>
+        </p:nvSpPr>
+        <p:spPr>
+          <a:xfrm>
+            <a:off x="731520" y="5120640"/>
+            <a:ext cx="2926080" cy="822960"/>
+          </a:xfrm>
+          <a:prstGeom prst="rect">
+            <a:avLst/>
+          </a:prstGeom>
+          <a:solidFill>
+            <a:srgbClr val="1E293B"/>
+          </a:solidFill>
+          <a:ln>
+            <a:solidFill>
+              <a:srgbClr val="38BDF8"/>
+            </a:solidFill>
+          </a:ln>
+        </p:spPr>
+        <p:style>
+          <a:lnRef idx="1">
+            <a:schemeClr val="accent1"/>
+          </a:lnRef>
+          <a:fillRef idx="3">
+            <a:schemeClr val="accent1"/>
+          </a:fillRef>
+          <a:effectRef idx="2">
+            <a:schemeClr val="accent1"/>
+          </a:effectRef>
+          <a:fontRef idx="minor">
+            <a:schemeClr val="lt1"/>
+          </a:fontRef>
+        </p:style>
+        <p:txBody>
+          <a:bodyPr rtlCol="0" anchor="ctr"/>
+          <a:lstStyle/>
+          <a:p>
+            <a:pPr algn="ctr">
+              <a:defRPr sz="1400" b="1">
+                <a:solidFill>
+                  <a:srgbClr val="38BDF8"/>
+                </a:solidFill>
+              </a:defRPr>
+            </a:pPr>
+            <a:r>
+              <a:t>4. QA Evaluation</a:t>
+            </a:r>
+          </a:p>
+        </p:txBody>
+      </p:sp>
+      <p:sp>
+        <p:nvSpPr>
+          <p:cNvPr id="11" name="TextBox 10"/>
+          <p:cNvSpPr txBox="1"/>
+          <p:nvPr/>
+        </p:nvSpPr>
+        <p:spPr>
+          <a:xfrm>
+            <a:off x="3931920" y="5120640"/>
+            <a:ext cx="7315200" cy="822960"/>
+          </a:xfrm>
+          <a:prstGeom prst="rect">
+            <a:avLst/>
+          </a:prstGeom>
+          <a:noFill/>
+        </p:spPr>
+        <p:txBody>
+          <a:bodyPr wrap="square">
+            <a:spAutoFit/>
+          </a:bodyPr>
+          <a:lstStyle/>
+          <a:p>
+            <a:pPr>
+              <a:defRPr sz="1400">
+                <a:solidFill>
+                  <a:srgbClr val="F8FAFC"/>
+                </a:solidFill>
+              </a:defRPr>
+            </a:pPr>
+            <a:r>
+              <a:t>Automated scoring, sentiment calculation, and database persistence.</a:t>
+            </a:r>
+          </a:p>
+        </p:txBody>
+      </p:sp>
+    </p:spTree>
+  </p:cSld>
+  <p:clrMapOvr>
+    <a:masterClrMapping/>
+  </p:clrMapOvr>
+</p:sld>
+</file>
+
+<file path=ppt/slides/slide4.xml><?xml version="1.0" encoding="utf-8"?>
+<p:sld xmlns:a="http://schemas.openxmlformats.org/drawingml/2006/main" xmlns:p="http://schemas.openxmlformats.org/presentationml/2006/main" xmlns:r="http://schemas.openxmlformats.org/officeDocument/2006/relationships">
+  <p:cSld>
+    <p:bg>
+      <p:bgPr>
+        <a:solidFill>
+          <a:srgbClr val="0F172A"/>
+        </a:solidFill>
+        <a:effectLst/>
+      </p:bgPr>
+    </p:bg>
+    <p:spTree>
+      <p:nvGrpSpPr>
+        <p:cNvPr id="1" name=""/>
+        <p:cNvGrpSpPr/>
+        <p:nvPr/>
+      </p:nvGrpSpPr>
+      <p:grpSpPr/>
+      <p:sp>
+        <p:nvSpPr>
+          <p:cNvPr id="2" name="TextBox 1"/>
+          <p:cNvSpPr txBox="1"/>
+          <p:nvPr/>
+        </p:nvSpPr>
+        <p:spPr>
+          <a:xfrm>
+            <a:off x="731520" y="457200"/>
+            <a:ext cx="10698480" cy="365760"/>
+          </a:xfrm>
+          <a:prstGeom prst="rect">
+            <a:avLst/>
+          </a:prstGeom>
+          <a:noFill/>
+        </p:spPr>
+        <p:txBody>
+          <a:bodyPr wrap="none">
+            <a:spAutoFit/>
+          </a:bodyPr>
+          <a:lstStyle/>
+          <a:p>
+            <a:pPr>
+              <a:defRPr sz="1000" b="1">
+                <a:solidFill>
+                  <a:srgbClr val="A855F7"/>
+                </a:solidFill>
+              </a:defRPr>
+            </a:pPr>
+            <a:r>
+              <a:t>VOICEPULSE AI // SYSTEM ARCHITECTURE</a:t>
+            </a:r>
+          </a:p>
+        </p:txBody>
+      </p:sp>
+      <p:sp>
+        <p:nvSpPr>
+          <p:cNvPr id="3" name="TextBox 2"/>
+          <p:cNvSpPr txBox="1"/>
+          <p:nvPr/>
+        </p:nvSpPr>
+        <p:spPr>
+          <a:xfrm>
+            <a:off x="731520" y="731520"/>
+            <a:ext cx="10698480" cy="731520"/>
+          </a:xfrm>
+          <a:prstGeom prst="rect">
+            <a:avLst/>
+          </a:prstGeom>
+          <a:noFill/>
+        </p:spPr>
+        <p:txBody>
+          <a:bodyPr wrap="square">
+            <a:spAutoFit/>
+          </a:bodyPr>
+          <a:lstStyle/>
+          <a:p>
+            <a:pPr>
+              <a:defRPr sz="2800" b="1">
+                <a:solidFill>
+                  <a:srgbClr val="F8FAFC"/>
+                </a:solidFill>
+              </a:defRPr>
+            </a:pPr>
+            <a:r>
+              <a:t>Enterprise Technology Stack &amp; Docker Deployment</a:t>
+            </a:r>
+          </a:p>
+        </p:txBody>
+      </p:sp>
+      <p:sp>
+        <p:nvSpPr>
+          <p:cNvPr id="4" name="Rounded Rectangle 3"/>
+          <p:cNvSpPr/>
+          <p:nvPr/>
+        </p:nvSpPr>
+        <p:spPr>
+          <a:xfrm>
+            <a:off x="731520" y="2011680"/>
+            <a:ext cx="3291840" cy="3840480"/>
+          </a:xfrm>
+          <a:prstGeom prst="roundRect">
+            <a:avLst/>
+          </a:prstGeom>
+          <a:solidFill>
+            <a:srgbClr val="1E293B"/>
+          </a:solidFill>
+          <a:ln>
+            <a:solidFill>
+              <a:srgbClr val="38BDF8"/>
+            </a:solidFill>
+          </a:ln>
+        </p:spPr>
+        <p:style>
+          <a:lnRef idx="1">
+            <a:schemeClr val="accent1"/>
+          </a:lnRef>
+          <a:fillRef idx="3">
+            <a:schemeClr val="accent1"/>
+          </a:fillRef>
+          <a:effectRef idx="2">
+            <a:schemeClr val="accent1"/>
+          </a:effectRef>
+          <a:fontRef idx="minor">
+            <a:schemeClr val="lt1"/>
+          </a:fontRef>
+        </p:style>
+        <p:txBody>
+          <a:bodyPr rtlCol="0" anchor="ctr" wrap="square" tIns="365760" lIns="274320"/>
+          <a:lstStyle/>
+          <a:p>
+            <a:pPr algn="ctr">
+              <a:defRPr sz="1800" b="1">
+                <a:solidFill>
+                  <a:srgbClr val="A855F7"/>
+                </a:solidFill>
+              </a:defRPr>
+            </a:pPr>
+            <a:r>
+              <a:t>Core Backend</a:t>
             </a:r>
           </a:p>
           <a:p>
             <a:pPr>
               <a:spcBef>
-                <a:spcPts val="1400"/>
+                <a:spcPts val="1200"/>
               </a:spcBef>
-              <a:defRPr sz="1800">
-                <a:solidFill>
-                  <a:srgbClr val="CBD5E1"/>
-                </a:solidFill>
-                <a:latin typeface="Segoe UI"/>
+              <a:defRPr sz="1400">
+                <a:solidFill>
+                  <a:srgbClr val="F8FAFC"/>
+                </a:solidFill>
               </a:defRPr>
             </a:pPr>
             <a:r>
-              <a:t>• Instant Risk Mitigation: Prevents regulatory penalties before a sales agent closes a conversation.</a:t>
+              <a:t>• FastAPI (Asynchronous)</a:t>
             </a:r>
           </a:p>
           <a:p>
             <a:pPr>
               <a:spcBef>
-                <a:spcPts val="1400"/>
+                <a:spcPts val="1200"/>
               </a:spcBef>
-              <a:defRPr sz="1800">
-                <a:solidFill>
-                  <a:srgbClr val="CBD5E1"/>
-                </a:solidFill>
-                <a:latin typeface="Segoe UI"/>
+              <a:defRPr sz="1400">
+                <a:solidFill>
+                  <a:srgbClr val="F8FAFC"/>
+                </a:solidFill>
               </a:defRPr>
             </a:pPr>
             <a:r>
-              <a:t>• Next-Phase Roadmap: Multi-speaker diarization (Agent vs. Customer segregation) and automated post-call executive PDF reporting.</a:t>
+              <a:t>• Uvicorn ASGI Server</a:t>
+            </a:r>
+          </a:p>
+          <a:p>
+            <a:pPr>
+              <a:spcBef>
+                <a:spcPts val="1200"/>
+              </a:spcBef>
+              <a:defRPr sz="1400">
+                <a:solidFill>
+                  <a:srgbClr val="F8FAFC"/>
+                </a:solidFill>
+              </a:defRPr>
+            </a:pPr>
+            <a:r>
+              <a:t>• Pydantic v2 Validation</a:t>
+            </a:r>
+          </a:p>
+          <a:p>
+            <a:pPr>
+              <a:spcBef>
+                <a:spcPts val="1200"/>
+              </a:spcBef>
+              <a:defRPr sz="1400">
+                <a:solidFill>
+                  <a:srgbClr val="F8FAFC"/>
+                </a:solidFill>
+              </a:defRPr>
+            </a:pPr>
+            <a:r>
+              <a:t>• Python 3.13 Runtime</a:t>
+            </a:r>
+          </a:p>
+        </p:txBody>
+      </p:sp>
+      <p:sp>
+        <p:nvSpPr>
+          <p:cNvPr id="5" name="Rounded Rectangle 4"/>
+          <p:cNvSpPr/>
+          <p:nvPr/>
+        </p:nvSpPr>
+        <p:spPr>
+          <a:xfrm>
+            <a:off x="4297680" y="2011680"/>
+            <a:ext cx="3291840" cy="3840480"/>
+          </a:xfrm>
+          <a:prstGeom prst="roundRect">
+            <a:avLst/>
+          </a:prstGeom>
+          <a:solidFill>
+            <a:srgbClr val="1E293B"/>
+          </a:solidFill>
+          <a:ln>
+            <a:solidFill>
+              <a:srgbClr val="38BDF8"/>
+            </a:solidFill>
+          </a:ln>
+        </p:spPr>
+        <p:style>
+          <a:lnRef idx="1">
+            <a:schemeClr val="accent1"/>
+          </a:lnRef>
+          <a:fillRef idx="3">
+            <a:schemeClr val="accent1"/>
+          </a:fillRef>
+          <a:effectRef idx="2">
+            <a:schemeClr val="accent1"/>
+          </a:effectRef>
+          <a:fontRef idx="minor">
+            <a:schemeClr val="lt1"/>
+          </a:fontRef>
+        </p:style>
+        <p:txBody>
+          <a:bodyPr rtlCol="0" anchor="ctr" wrap="square" tIns="365760" lIns="274320"/>
+          <a:lstStyle/>
+          <a:p>
+            <a:pPr algn="ctr">
+              <a:defRPr sz="1800" b="1">
+                <a:solidFill>
+                  <a:srgbClr val="A855F7"/>
+                </a:solidFill>
+              </a:defRPr>
+            </a:pPr>
+            <a:r>
+              <a:t>Data &amp; Integration</a:t>
+            </a:r>
+          </a:p>
+          <a:p>
+            <a:pPr>
+              <a:spcBef>
+                <a:spcPts val="1200"/>
+              </a:spcBef>
+              <a:defRPr sz="1400">
+                <a:solidFill>
+                  <a:srgbClr val="F8FAFC"/>
+                </a:solidFill>
+              </a:defRPr>
+            </a:pPr>
+            <a:r>
+              <a:t>• AssemblyAI Speech API</a:t>
+            </a:r>
+          </a:p>
+          <a:p>
+            <a:pPr>
+              <a:spcBef>
+                <a:spcPts val="1200"/>
+              </a:spcBef>
+              <a:defRPr sz="1400">
+                <a:solidFill>
+                  <a:srgbClr val="F8FAFC"/>
+                </a:solidFill>
+              </a:defRPr>
+            </a:pPr>
+            <a:r>
+              <a:t>• SQLAlchemy ORM</a:t>
+            </a:r>
+          </a:p>
+          <a:p>
+            <a:pPr>
+              <a:spcBef>
+                <a:spcPts val="1200"/>
+              </a:spcBef>
+              <a:defRPr sz="1400">
+                <a:solidFill>
+                  <a:srgbClr val="F8FAFC"/>
+                </a:solidFill>
+              </a:defRPr>
+            </a:pPr>
+            <a:r>
+              <a:t>• SQLite Persistence</a:t>
+            </a:r>
+          </a:p>
+          <a:p>
+            <a:pPr>
+              <a:spcBef>
+                <a:spcPts val="1200"/>
+              </a:spcBef>
+              <a:defRPr sz="1400">
+                <a:solidFill>
+                  <a:srgbClr val="F8FAFC"/>
+                </a:solidFill>
+              </a:defRPr>
+            </a:pPr>
+            <a:r>
+              <a:t>• Requests Network Layer</a:t>
+            </a:r>
+          </a:p>
+        </p:txBody>
+      </p:sp>
+      <p:sp>
+        <p:nvSpPr>
+          <p:cNvPr id="6" name="Rounded Rectangle 5"/>
+          <p:cNvSpPr/>
+          <p:nvPr/>
+        </p:nvSpPr>
+        <p:spPr>
+          <a:xfrm>
+            <a:off x="7863840" y="2011680"/>
+            <a:ext cx="3291840" cy="3840480"/>
+          </a:xfrm>
+          <a:prstGeom prst="roundRect">
+            <a:avLst/>
+          </a:prstGeom>
+          <a:solidFill>
+            <a:srgbClr val="1E293B"/>
+          </a:solidFill>
+          <a:ln>
+            <a:solidFill>
+              <a:srgbClr val="38BDF8"/>
+            </a:solidFill>
+          </a:ln>
+        </p:spPr>
+        <p:style>
+          <a:lnRef idx="1">
+            <a:schemeClr val="accent1"/>
+          </a:lnRef>
+          <a:fillRef idx="3">
+            <a:schemeClr val="accent1"/>
+          </a:fillRef>
+          <a:effectRef idx="2">
+            <a:schemeClr val="accent1"/>
+          </a:effectRef>
+          <a:fontRef idx="minor">
+            <a:schemeClr val="lt1"/>
+          </a:fontRef>
+        </p:style>
+        <p:txBody>
+          <a:bodyPr rtlCol="0" anchor="ctr" wrap="square" tIns="365760" lIns="274320"/>
+          <a:lstStyle/>
+          <a:p>
+            <a:pPr algn="ctr">
+              <a:defRPr sz="1800" b="1">
+                <a:solidFill>
+                  <a:srgbClr val="A855F7"/>
+                </a:solidFill>
+              </a:defRPr>
+            </a:pPr>
+            <a:r>
+              <a:t>DevOps &amp; Production</a:t>
+            </a:r>
+          </a:p>
+          <a:p>
+            <a:pPr>
+              <a:spcBef>
+                <a:spcPts val="1200"/>
+              </a:spcBef>
+              <a:defRPr sz="1400">
+                <a:solidFill>
+                  <a:srgbClr val="F8FAFC"/>
+                </a:solidFill>
+              </a:defRPr>
+            </a:pPr>
+            <a:r>
+              <a:t>• Docker Containerization</a:t>
+            </a:r>
+          </a:p>
+          <a:p>
+            <a:pPr>
+              <a:spcBef>
+                <a:spcPts val="1200"/>
+              </a:spcBef>
+              <a:defRPr sz="1400">
+                <a:solidFill>
+                  <a:srgbClr val="F8FAFC"/>
+                </a:solidFill>
+              </a:defRPr>
+            </a:pPr>
+            <a:r>
+              <a:t>• Multi-stage Dockerfile</a:t>
+            </a:r>
+          </a:p>
+          <a:p>
+            <a:pPr>
+              <a:spcBef>
+                <a:spcPts val="1200"/>
+              </a:spcBef>
+              <a:defRPr sz="1400">
+                <a:solidFill>
+                  <a:srgbClr val="F8FAFC"/>
+                </a:solidFill>
+              </a:defRPr>
+            </a:pPr>
+            <a:r>
+              <a:t>• Docker Compose Config</a:t>
+            </a:r>
+          </a:p>
+          <a:p>
+            <a:pPr>
+              <a:spcBef>
+                <a:spcPts val="1200"/>
+              </a:spcBef>
+              <a:defRPr sz="1400">
+                <a:solidFill>
+                  <a:srgbClr val="F8FAFC"/>
+                </a:solidFill>
+              </a:defRPr>
+            </a:pPr>
+            <a:r>
+              <a:t>• Automated Health Checks</a:t>
             </a:r>
           </a:p>
         </p:txBody>
